--- a/public/downloads/Hackathon-GPU-Presentation.pptx
+++ b/public/downloads/Hackathon-GPU-Presentation.pptx
@@ -14454,14 +14454,7 @@
           </a:bodyPr>
           <a:lstStyle/>
           <a:p>
-            <a:r>
-              <a:rPr lang="en-US" sz="1350" dirty="0">
-                <a:solidFill>
-                  <a:schemeClr val="accent3"/>
-                </a:solidFill>
-              </a:rPr>
-              <a:t>Eight choices that define the system’s architecture</a:t>
-            </a:r>
+            <a:endParaRPr lang="en-US" sz="1350" dirty="0"/>
           </a:p>
         </p:txBody>
       </p:sp>
@@ -15388,7 +15381,7 @@
                   <a:schemeClr val="accent3"/>
                 </a:solidFill>
               </a:rPr>
-              <a:t>8 Decisions</a:t>
+              <a:t>Architecture</a:t>
             </a:r>
           </a:p>
           <a:p>
@@ -15416,7 +15409,7 @@
                   <a:schemeClr val="accent3"/>
                 </a:solidFill>
               </a:rPr>
-              <a:t>No amount of software cleverness can overcome hardware realities. Data layout, thread mapping, and execution guarantees shape everything that follows.</a:t>
+              <a:t>Every decision shaped the system’s speed, correctness, or extensibility. None were made by preference — all were made by requirement.</a:t>
             </a:r>
           </a:p>
         </p:txBody>
@@ -15435,7 +15428,7 @@
 </file>
 
 <file path=ppt/slides/slide15.xml><?xml version="1.0" encoding="utf-8"?>
-<p:sld xmlns:a="http://schemas.openxmlformats.org/drawingml/2006/main" xmlns:r="http://schemas.openxmlformats.org/officeDocument/2006/relationships" xmlns:p="http://schemas.openxmlformats.org/presentationml/2006/main">
+<p:sld xmlns:p="http://schemas.openxmlformats.org/presentationml/2006/main" xmlns:a="http://schemas.openxmlformats.org/drawingml/2006/main" xmlns:a16="http://schemas.microsoft.com/office/drawing/2014/main" xmlns:p14="http://schemas.microsoft.com/office/powerpoint/2010/main">
   <p:cSld>
     <p:spTree>
       <p:nvGrpSpPr>
@@ -15456,7 +15449,7 @@
           <p:cNvPr id="2" name="Titel 1">
             <a:extLst>
               <a:ext uri="{FF2B5EF4-FFF2-40B4-BE49-F238E27FC236}">
-                <a16:creationId xmlns:a16="http://schemas.microsoft.com/office/drawing/2014/main" id="{392B6075-F8EF-BB9E-3E97-63524797FF32}"/>
+                <a16:creationId id="{392B6075-F8EF-BB9E-3E97-63524797FF32}"/>
               </a:ext>
             </a:extLst>
           </p:cNvPr>
@@ -15485,7 +15478,7 @@
           <p:cNvPr id="8" name="Tekstvak 7">
             <a:extLst>
               <a:ext uri="{FF2B5EF4-FFF2-40B4-BE49-F238E27FC236}">
-                <a16:creationId xmlns:a16="http://schemas.microsoft.com/office/drawing/2014/main" id="{A747C7D7-477D-1A2F-A601-68D9CAB92875}"/>
+                <a16:creationId id="{A747C7D7-477D-1A2F-A601-68D9CAB92875}"/>
               </a:ext>
             </a:extLst>
           </p:cNvPr>
@@ -15508,29 +15501,7 @@
           </a:bodyPr>
           <a:lstStyle/>
           <a:p>
-            <a:r>
-              <a:rPr lang="en-US" sz="1350" dirty="0">
-                <a:solidFill>
-                  <a:schemeClr val="accent3"/>
-                </a:solidFill>
-              </a:rPr>
-              <a:t xml:space="preserve">Extending ACTUS beyond banking — </a:t>
-            </a:r>
-            <a:br>
-              <a:rPr lang="en-US" sz="1350" dirty="0">
-                <a:solidFill>
-                  <a:schemeClr val="accent3"/>
-                </a:solidFill>
-              </a:rPr>
-            </a:br>
-            <a:r>
-              <a:rPr lang="en-US" sz="1350" dirty="0">
-                <a:solidFill>
-                  <a:schemeClr val="accent3"/>
-                </a:solidFill>
-              </a:rPr>
-              <a:t>into the insurance domain</a:t>
-            </a:r>
+            <a:endParaRPr lang="en-US" sz="1350" dirty="0"/>
           </a:p>
         </p:txBody>
       </p:sp>
@@ -15539,7 +15510,7 @@
           <p:cNvPr id="9" name="Groep 8">
             <a:extLst>
               <a:ext uri="{FF2B5EF4-FFF2-40B4-BE49-F238E27FC236}">
-                <a16:creationId xmlns:a16="http://schemas.microsoft.com/office/drawing/2014/main" id="{51C5275E-B5C9-DC4D-D96D-5381EC6750D4}"/>
+                <a16:creationId id="{51C5275E-B5C9-DC4D-D96D-5381EC6750D4}"/>
               </a:ext>
             </a:extLst>
           </p:cNvPr>
@@ -15559,7 +15530,7 @@
             <p:cNvPr id="10" name="Shape 4">
               <a:extLst>
                 <a:ext uri="{FF2B5EF4-FFF2-40B4-BE49-F238E27FC236}">
-                  <a16:creationId xmlns:a16="http://schemas.microsoft.com/office/drawing/2014/main" id="{200E0908-F065-55B4-C8AE-A46D08949D78}"/>
+                  <a16:creationId id="{200E0908-F065-55B4-C8AE-A46D08949D78}"/>
                 </a:ext>
               </a:extLst>
             </p:cNvPr>
@@ -15599,7 +15570,7 @@
             <p:cNvPr id="11" name="Shape 5">
               <a:extLst>
                 <a:ext uri="{FF2B5EF4-FFF2-40B4-BE49-F238E27FC236}">
-                  <a16:creationId xmlns:a16="http://schemas.microsoft.com/office/drawing/2014/main" id="{5DE56BDE-76D6-EF9D-E6BF-71F148F9BD6B}"/>
+                  <a16:creationId id="{5DE56BDE-76D6-EF9D-E6BF-71F148F9BD6B}"/>
                 </a:ext>
               </a:extLst>
             </p:cNvPr>
@@ -15632,7 +15603,7 @@
             <p:cNvPr id="12" name="Text 6">
               <a:extLst>
                 <a:ext uri="{FF2B5EF4-FFF2-40B4-BE49-F238E27FC236}">
-                  <a16:creationId xmlns:a16="http://schemas.microsoft.com/office/drawing/2014/main" id="{1C8F99A8-D28F-89E4-F582-4495CC412BCA}"/>
+                  <a16:creationId id="{1C8F99A8-D28F-89E4-F582-4495CC412BCA}"/>
                 </a:ext>
               </a:extLst>
             </p:cNvPr>
@@ -15672,7 +15643,7 @@
             <p:cNvPr id="13" name="Text 7">
               <a:extLst>
                 <a:ext uri="{FF2B5EF4-FFF2-40B4-BE49-F238E27FC236}">
-                  <a16:creationId xmlns:a16="http://schemas.microsoft.com/office/drawing/2014/main" id="{5CE60DD7-33F2-7CDD-BB8E-BB4A5F88B398}"/>
+                  <a16:creationId id="{5CE60DD7-33F2-7CDD-BB8E-BB4A5F88B398}"/>
                 </a:ext>
               </a:extLst>
             </p:cNvPr>
@@ -15715,7 +15686,7 @@
             <p:cNvPr id="14" name="Text 8">
               <a:extLst>
                 <a:ext uri="{FF2B5EF4-FFF2-40B4-BE49-F238E27FC236}">
-                  <a16:creationId xmlns:a16="http://schemas.microsoft.com/office/drawing/2014/main" id="{3CB0FE64-4475-202D-F497-B2E4A8E21AAE}"/>
+                  <a16:creationId id="{3CB0FE64-4475-202D-F497-B2E4A8E21AAE}"/>
                 </a:ext>
               </a:extLst>
             </p:cNvPr>
@@ -15760,7 +15731,7 @@
           <p:cNvPr id="15" name="Groep 14">
             <a:extLst>
               <a:ext uri="{FF2B5EF4-FFF2-40B4-BE49-F238E27FC236}">
-                <a16:creationId xmlns:a16="http://schemas.microsoft.com/office/drawing/2014/main" id="{7C953152-C2A3-1E26-854E-AD02B59A234F}"/>
+                <a16:creationId id="{7C953152-C2A3-1E26-854E-AD02B59A234F}"/>
               </a:ext>
             </a:extLst>
           </p:cNvPr>
@@ -15780,7 +15751,7 @@
             <p:cNvPr id="16" name="Shape 4">
               <a:extLst>
                 <a:ext uri="{FF2B5EF4-FFF2-40B4-BE49-F238E27FC236}">
-                  <a16:creationId xmlns:a16="http://schemas.microsoft.com/office/drawing/2014/main" id="{19714F31-F00A-FFE0-FE33-DB1028262CFB}"/>
+                  <a16:creationId id="{19714F31-F00A-FFE0-FE33-DB1028262CFB}"/>
                 </a:ext>
               </a:extLst>
             </p:cNvPr>
@@ -15820,7 +15791,7 @@
             <p:cNvPr id="17" name="Shape 5">
               <a:extLst>
                 <a:ext uri="{FF2B5EF4-FFF2-40B4-BE49-F238E27FC236}">
-                  <a16:creationId xmlns:a16="http://schemas.microsoft.com/office/drawing/2014/main" id="{7DC078A5-2C58-3FFF-1D5D-89E6FD9FDA00}"/>
+                  <a16:creationId id="{7DC078A5-2C58-3FFF-1D5D-89E6FD9FDA00}"/>
                 </a:ext>
               </a:extLst>
             </p:cNvPr>
@@ -15853,7 +15824,7 @@
             <p:cNvPr id="18" name="Text 6">
               <a:extLst>
                 <a:ext uri="{FF2B5EF4-FFF2-40B4-BE49-F238E27FC236}">
-                  <a16:creationId xmlns:a16="http://schemas.microsoft.com/office/drawing/2014/main" id="{4EA56DE3-74E8-3013-C82A-C66CCCB69476}"/>
+                  <a16:creationId id="{4EA56DE3-74E8-3013-C82A-C66CCCB69476}"/>
                 </a:ext>
               </a:extLst>
             </p:cNvPr>
@@ -15893,7 +15864,7 @@
             <p:cNvPr id="19" name="Text 7">
               <a:extLst>
                 <a:ext uri="{FF2B5EF4-FFF2-40B4-BE49-F238E27FC236}">
-                  <a16:creationId xmlns:a16="http://schemas.microsoft.com/office/drawing/2014/main" id="{FBFE2B09-DEA4-ED70-2D82-D920C27956D6}"/>
+                  <a16:creationId id="{FBFE2B09-DEA4-ED70-2D82-D920C27956D6}"/>
                 </a:ext>
               </a:extLst>
             </p:cNvPr>
@@ -15936,7 +15907,7 @@
             <p:cNvPr id="20" name="Text 8">
               <a:extLst>
                 <a:ext uri="{FF2B5EF4-FFF2-40B4-BE49-F238E27FC236}">
-                  <a16:creationId xmlns:a16="http://schemas.microsoft.com/office/drawing/2014/main" id="{33D4478A-5F92-B458-9C9E-6B73876EC5B3}"/>
+                  <a16:creationId id="{33D4478A-5F92-B458-9C9E-6B73876EC5B3}"/>
                 </a:ext>
               </a:extLst>
             </p:cNvPr>
@@ -15981,7 +15952,7 @@
           <p:cNvPr id="21" name="Groep 20">
             <a:extLst>
               <a:ext uri="{FF2B5EF4-FFF2-40B4-BE49-F238E27FC236}">
-                <a16:creationId xmlns:a16="http://schemas.microsoft.com/office/drawing/2014/main" id="{71D6B59E-2332-8AAD-70D1-25A49CDCF723}"/>
+                <a16:creationId id="{71D6B59E-2332-8AAD-70D1-25A49CDCF723}"/>
               </a:ext>
             </a:extLst>
           </p:cNvPr>
@@ -16001,7 +15972,7 @@
             <p:cNvPr id="22" name="Shape 4">
               <a:extLst>
                 <a:ext uri="{FF2B5EF4-FFF2-40B4-BE49-F238E27FC236}">
-                  <a16:creationId xmlns:a16="http://schemas.microsoft.com/office/drawing/2014/main" id="{BA378B12-0052-2152-FB10-F81802831273}"/>
+                  <a16:creationId id="{BA378B12-0052-2152-FB10-F81802831273}"/>
                 </a:ext>
               </a:extLst>
             </p:cNvPr>
@@ -16041,7 +16012,7 @@
             <p:cNvPr id="23" name="Shape 5">
               <a:extLst>
                 <a:ext uri="{FF2B5EF4-FFF2-40B4-BE49-F238E27FC236}">
-                  <a16:creationId xmlns:a16="http://schemas.microsoft.com/office/drawing/2014/main" id="{F47D767B-346A-DE8D-BB20-CED9DAEC4A2D}"/>
+                  <a16:creationId id="{F47D767B-346A-DE8D-BB20-CED9DAEC4A2D}"/>
                 </a:ext>
               </a:extLst>
             </p:cNvPr>
@@ -16074,7 +16045,7 @@
             <p:cNvPr id="24" name="Text 6">
               <a:extLst>
                 <a:ext uri="{FF2B5EF4-FFF2-40B4-BE49-F238E27FC236}">
-                  <a16:creationId xmlns:a16="http://schemas.microsoft.com/office/drawing/2014/main" id="{E2DE7F1B-EB0C-C77D-B911-D3AFE7A44552}"/>
+                  <a16:creationId id="{E2DE7F1B-EB0C-C77D-B911-D3AFE7A44552}"/>
                 </a:ext>
               </a:extLst>
             </p:cNvPr>
@@ -16114,7 +16085,7 @@
             <p:cNvPr id="25" name="Text 7">
               <a:extLst>
                 <a:ext uri="{FF2B5EF4-FFF2-40B4-BE49-F238E27FC236}">
-                  <a16:creationId xmlns:a16="http://schemas.microsoft.com/office/drawing/2014/main" id="{16C58CBB-E7CC-B0F2-4A35-9D5EE2FC521E}"/>
+                  <a16:creationId id="{16C58CBB-E7CC-B0F2-4A35-9D5EE2FC521E}"/>
                 </a:ext>
               </a:extLst>
             </p:cNvPr>
@@ -16157,7 +16128,7 @@
             <p:cNvPr id="26" name="Text 8">
               <a:extLst>
                 <a:ext uri="{FF2B5EF4-FFF2-40B4-BE49-F238E27FC236}">
-                  <a16:creationId xmlns:a16="http://schemas.microsoft.com/office/drawing/2014/main" id="{DF8BD351-595A-5E84-28D4-0D71BD986961}"/>
+                  <a16:creationId id="{DF8BD351-595A-5E84-28D4-0D71BD986961}"/>
                 </a:ext>
               </a:extLst>
             </p:cNvPr>
@@ -16202,7 +16173,7 @@
           <p:cNvPr id="27" name="Groep 26">
             <a:extLst>
               <a:ext uri="{FF2B5EF4-FFF2-40B4-BE49-F238E27FC236}">
-                <a16:creationId xmlns:a16="http://schemas.microsoft.com/office/drawing/2014/main" id="{65180AD8-6885-BEE1-0F97-3905BBB09FDF}"/>
+                <a16:creationId id="{65180AD8-6885-BEE1-0F97-3905BBB09FDF}"/>
               </a:ext>
             </a:extLst>
           </p:cNvPr>
@@ -16222,7 +16193,7 @@
             <p:cNvPr id="28" name="Shape 4">
               <a:extLst>
                 <a:ext uri="{FF2B5EF4-FFF2-40B4-BE49-F238E27FC236}">
-                  <a16:creationId xmlns:a16="http://schemas.microsoft.com/office/drawing/2014/main" id="{B7478B08-8F47-F3D1-B64C-240CC067108E}"/>
+                  <a16:creationId id="{B7478B08-8F47-F3D1-B64C-240CC067108E}"/>
                 </a:ext>
               </a:extLst>
             </p:cNvPr>
@@ -16262,7 +16233,7 @@
             <p:cNvPr id="29" name="Shape 5">
               <a:extLst>
                 <a:ext uri="{FF2B5EF4-FFF2-40B4-BE49-F238E27FC236}">
-                  <a16:creationId xmlns:a16="http://schemas.microsoft.com/office/drawing/2014/main" id="{B9C17839-094E-8594-518D-91712C20A508}"/>
+                  <a16:creationId id="{B9C17839-094E-8594-518D-91712C20A508}"/>
                 </a:ext>
               </a:extLst>
             </p:cNvPr>
@@ -16295,7 +16266,7 @@
             <p:cNvPr id="30" name="Text 6">
               <a:extLst>
                 <a:ext uri="{FF2B5EF4-FFF2-40B4-BE49-F238E27FC236}">
-                  <a16:creationId xmlns:a16="http://schemas.microsoft.com/office/drawing/2014/main" id="{AA745432-2CFF-EE4F-5627-006262730579}"/>
+                  <a16:creationId id="{AA745432-2CFF-EE4F-5627-006262730579}"/>
                 </a:ext>
               </a:extLst>
             </p:cNvPr>
@@ -16335,7 +16306,7 @@
             <p:cNvPr id="31" name="Text 7">
               <a:extLst>
                 <a:ext uri="{FF2B5EF4-FFF2-40B4-BE49-F238E27FC236}">
-                  <a16:creationId xmlns:a16="http://schemas.microsoft.com/office/drawing/2014/main" id="{55419DDD-611D-50AF-570C-5708A14D0422}"/>
+                  <a16:creationId id="{55419DDD-611D-50AF-570C-5708A14D0422}"/>
                 </a:ext>
               </a:extLst>
             </p:cNvPr>
@@ -16378,7 +16349,7 @@
             <p:cNvPr id="32" name="Text 8">
               <a:extLst>
                 <a:ext uri="{FF2B5EF4-FFF2-40B4-BE49-F238E27FC236}">
-                  <a16:creationId xmlns:a16="http://schemas.microsoft.com/office/drawing/2014/main" id="{DEB4390F-34B0-FE2C-E373-C3647D1A11E7}"/>
+                  <a16:creationId id="{DEB4390F-34B0-FE2C-E373-C3647D1A11E7}"/>
                 </a:ext>
               </a:extLst>
             </p:cNvPr>
@@ -16423,7 +16394,7 @@
           <p:cNvPr id="34" name="Tekstvak 33">
             <a:extLst>
               <a:ext uri="{FF2B5EF4-FFF2-40B4-BE49-F238E27FC236}">
-                <a16:creationId xmlns:a16="http://schemas.microsoft.com/office/drawing/2014/main" id="{32D872B8-8E3D-4605-665D-4756A56C32E5}"/>
+                <a16:creationId id="{32D872B8-8E3D-4605-665D-4756A56C32E5}"/>
               </a:ext>
             </a:extLst>
           </p:cNvPr>
@@ -16457,7 +16428,7 @@
                   <a:schemeClr val="accent3"/>
                 </a:solidFill>
               </a:rPr>
-              <a:t>Execution Platform</a:t>
+              <a:t>Insurance</a:t>
             </a:r>
           </a:p>
           <a:p>
@@ -16497,29 +16468,7 @@
                   <a:schemeClr val="accent3"/>
                 </a:solidFill>
               </a:rPr>
-              <a:t>The decision wasn't about preference — it was about choosing the environment that gave the most controlled, reliable path to proving performance at scale.</a:t>
-            </a:r>
-            <a:br>
-              <a:rPr lang="en-US" sz="1350" dirty="0">
-                <a:solidFill>
-                  <a:schemeClr val="accent3"/>
-                </a:solidFill>
-              </a:rPr>
-            </a:br>
-            <a:br>
-              <a:rPr lang="en-US" sz="1350" dirty="0">
-                <a:solidFill>
-                  <a:schemeClr val="accent3"/>
-                </a:solidFill>
-              </a:rPr>
-            </a:br>
-            <a:r>
-              <a:rPr lang="en-US" sz="1350" dirty="0">
-                <a:solidFill>
-                  <a:schemeClr val="accent3"/>
-                </a:solidFill>
-              </a:rPr>
-              <a:t>Deep platform familiarity reduced implementation risk and allowed faster iteration without sacrificing correctness</a:t>
+              <a:t>Banking contracts follow fixed schedules. Insurance policies follow probabilistic state maps. The highway was extended to handle both — with the same deterministic guarantee.</a:t>
             </a:r>
           </a:p>
         </p:txBody>
@@ -16527,7 +16476,7 @@
     </p:spTree>
     <p:extLst>
       <p:ext uri="{BB962C8B-B14F-4D97-AF65-F5344CB8AC3E}">
-        <p14:creationId xmlns:p14="http://schemas.microsoft.com/office/powerpoint/2010/main" val="1198592637"/>
+        <p14:creationId val="1198592637"/>
       </p:ext>
     </p:extLst>
   </p:cSld>
@@ -22318,29 +22267,7 @@
           </a:bodyPr>
           <a:lstStyle/>
           <a:p>
-            <a:r>
-              <a:rPr lang="en-US" sz="1350" dirty="0">
-                <a:solidFill>
-                  <a:schemeClr val="accent3"/>
-                </a:solidFill>
-              </a:rPr>
-              <a:t xml:space="preserve">Dec 2025 to Mar 2026 — nine </a:t>
-            </a:r>
-            <a:br>
-              <a:rPr lang="en-US" sz="1350" dirty="0">
-                <a:solidFill>
-                  <a:schemeClr val="accent3"/>
-                </a:solidFill>
-              </a:rPr>
-            </a:br>
-            <a:r>
-              <a:rPr lang="en-US" sz="1350" dirty="0">
-                <a:solidFill>
-                  <a:schemeClr val="accent3"/>
-                </a:solidFill>
-              </a:rPr>
-              <a:t>disciplined phases</a:t>
-            </a:r>
+            <a:endParaRPr lang="en-US" sz="1350" dirty="0"/>
           </a:p>
         </p:txBody>
       </p:sp>
@@ -23267,7 +23194,7 @@
                   <a:schemeClr val="accent3"/>
                 </a:solidFill>
               </a:rPr>
-              <a:t>Execution Platform</a:t>
+              <a:t>Journey</a:t>
             </a:r>
           </a:p>
           <a:p>
@@ -23307,7 +23234,7 @@
                   <a:schemeClr val="accent3"/>
                 </a:solidFill>
               </a:rPr>
-              <a:t>The decision wasn't about preference — it was about choosing the environment that gave the most controlled, reliable path to proving performance at scale.</a:t>
+              <a:t>Nine phases from studying the ACTUS spec to delivering a working GPU engine with insurance extensions, documentation, and reporting.</a:t>
             </a:r>
             <a:br>
               <a:rPr lang="en-US" sz="1350" dirty="0">
@@ -23329,7 +23256,7 @@
                   <a:schemeClr val="accent3"/>
                 </a:solidFill>
               </a:rPr>
-              <a:t>Deep platform familiarity reduced implementation risk and allowed faster iteration without sacrificing correctness</a:t>
+              <a:t/>
             </a:r>
           </a:p>
         </p:txBody>
